--- a/Projeto de Software e Segurança da Informação - 2026/Projeto de Software/Aula13-BancoDados/Banco de Dados.pptx
+++ b/Projeto de Software e Segurança da Informação - 2026/Projeto de Software/Aula13-BancoDados/Banco de Dados.pptx
@@ -5,10 +5,10 @@
     <p:sldMasterId id="2147483677" r:id="rId4"/>
   </p:sldMasterIdLst>
   <p:notesMasterIdLst>
-    <p:notesMasterId r:id="rId12"/>
+    <p:notesMasterId r:id="rId15"/>
   </p:notesMasterIdLst>
   <p:handoutMasterIdLst>
-    <p:handoutMasterId r:id="rId13"/>
+    <p:handoutMasterId r:id="rId16"/>
   </p:handoutMasterIdLst>
   <p:sldIdLst>
     <p:sldId id="256" r:id="rId5"/>
@@ -18,6 +18,9 @@
     <p:sldId id="260" r:id="rId9"/>
     <p:sldId id="261" r:id="rId10"/>
     <p:sldId id="262" r:id="rId11"/>
+    <p:sldId id="263" r:id="rId12"/>
+    <p:sldId id="264" r:id="rId13"/>
+    <p:sldId id="265" r:id="rId14"/>
   </p:sldIdLst>
   <p:sldSz cx="12192000" cy="6858000"/>
   <p:notesSz cx="6858000" cy="9144000"/>
@@ -3992,6 +3995,109 @@
 </p:sld>
 </file>
 
+<file path=ppt/slides/slide10.xml><?xml version="1.0" encoding="utf-8"?>
+<p:sld xmlns:a="http://schemas.openxmlformats.org/drawingml/2006/main" xmlns:r="http://schemas.openxmlformats.org/officeDocument/2006/relationships" xmlns:p="http://schemas.openxmlformats.org/presentationml/2006/main">
+  <p:cSld>
+    <p:spTree>
+      <p:nvGrpSpPr>
+        <p:cNvPr id="1" name=""/>
+        <p:cNvGrpSpPr/>
+        <p:nvPr/>
+      </p:nvGrpSpPr>
+      <p:grpSpPr>
+        <a:xfrm>
+          <a:off x="0" y="0"/>
+          <a:ext cx="0" cy="0"/>
+          <a:chOff x="0" y="0"/>
+          <a:chExt cx="0" cy="0"/>
+        </a:xfrm>
+      </p:grpSpPr>
+      <p:sp>
+        <p:nvSpPr>
+          <p:cNvPr id="2" name="Título 1">
+            <a:extLst>
+              <a:ext uri="{FF2B5EF4-FFF2-40B4-BE49-F238E27FC236}">
+                <a16:creationId xmlns:a16="http://schemas.microsoft.com/office/drawing/2014/main" id="{889059E2-DEC4-3D33-2D9D-4F895C9D8139}"/>
+              </a:ext>
+            </a:extLst>
+          </p:cNvPr>
+          <p:cNvSpPr>
+            <a:spLocks noGrp="1"/>
+          </p:cNvSpPr>
+          <p:nvPr>
+            <p:ph type="title"/>
+          </p:nvPr>
+        </p:nvSpPr>
+        <p:spPr/>
+        <p:txBody>
+          <a:bodyPr/>
+          <a:lstStyle/>
+          <a:p>
+            <a:r>
+              <a:rPr lang="pt-BR" dirty="0"/>
+              <a:t>Conclusão</a:t>
+            </a:r>
+          </a:p>
+        </p:txBody>
+      </p:sp>
+      <p:sp>
+        <p:nvSpPr>
+          <p:cNvPr id="3" name="Espaço Reservado para Conteúdo 2">
+            <a:extLst>
+              <a:ext uri="{FF2B5EF4-FFF2-40B4-BE49-F238E27FC236}">
+                <a16:creationId xmlns:a16="http://schemas.microsoft.com/office/drawing/2014/main" id="{E62E4210-C0CB-EA50-5FA8-19B1D6AAD243}"/>
+              </a:ext>
+            </a:extLst>
+          </p:cNvPr>
+          <p:cNvSpPr>
+            <a:spLocks noGrp="1"/>
+          </p:cNvSpPr>
+          <p:nvPr>
+            <p:ph idx="1"/>
+          </p:nvPr>
+        </p:nvSpPr>
+        <p:spPr/>
+        <p:txBody>
+          <a:bodyPr/>
+          <a:lstStyle/>
+          <a:p>
+            <a:pPr algn="just"/>
+            <a:r>
+              <a:rPr lang="pt-BR" dirty="0"/>
+              <a:t>JDBC é a API de baixo nível do Java para comunicação direta com bancos de dados. JPA é uma especificação que padroniza como a persistência de dados deve funcionar em Java. </a:t>
+            </a:r>
+            <a:r>
+              <a:rPr lang="pt-BR" dirty="0" err="1"/>
+              <a:t>Hibernate</a:t>
+            </a:r>
+            <a:r>
+              <a:rPr lang="pt-BR" dirty="0"/>
+              <a:t> é a implementação mais popular dessa especificação, eliminando a escrita manual de SQL. Já o Spring Data JPA vai um passo além, adicionando uma camada de abstração sobre o </a:t>
+            </a:r>
+            <a:r>
+              <a:rPr lang="pt-BR" dirty="0" err="1"/>
+              <a:t>Hibernate</a:t>
+            </a:r>
+            <a:r>
+              <a:rPr lang="pt-BR" dirty="0"/>
+              <a:t> que reduz ainda mais o código necessário, integrando tudo ao ecossistema Spring.</a:t>
+            </a:r>
+          </a:p>
+        </p:txBody>
+      </p:sp>
+    </p:spTree>
+    <p:extLst>
+      <p:ext uri="{BB962C8B-B14F-4D97-AF65-F5344CB8AC3E}">
+        <p14:creationId xmlns:p14="http://schemas.microsoft.com/office/powerpoint/2010/main" val="3910667920"/>
+      </p:ext>
+    </p:extLst>
+  </p:cSld>
+  <p:clrMapOvr>
+    <a:masterClrMapping/>
+  </p:clrMapOvr>
+</p:sld>
+</file>
+
 <file path=ppt/slides/slide2.xml><?xml version="1.0" encoding="utf-8"?>
 <p:sld xmlns:a="http://schemas.openxmlformats.org/drawingml/2006/main" xmlns:r="http://schemas.openxmlformats.org/officeDocument/2006/relationships" xmlns:p="http://schemas.openxmlformats.org/presentationml/2006/main">
   <p:cSld>
@@ -5743,8 +5849,8 @@
         </p:nvSpPr>
         <p:spPr>
           <a:xfrm>
-            <a:off x="566947" y="2149475"/>
-            <a:ext cx="5617953" cy="4441825"/>
+            <a:off x="566947" y="2149476"/>
+            <a:ext cx="5617953" cy="3333750"/>
           </a:xfrm>
         </p:spPr>
         <p:txBody>
@@ -5905,7 +6011,11 @@
           <a:bodyPr/>
           <a:lstStyle/>
           <a:p>
-            <a:endParaRPr lang="pt-BR"/>
+            <a:r>
+              <a:rPr lang="pt-BR" dirty="0" err="1"/>
+              <a:t>Hibernate</a:t>
+            </a:r>
+            <a:endParaRPr lang="pt-BR" dirty="0"/>
           </a:p>
         </p:txBody>
       </p:sp>
@@ -5925,19 +6035,613 @@
             <p:ph idx="1"/>
           </p:nvPr>
         </p:nvSpPr>
-        <p:spPr/>
+        <p:spPr>
+          <a:xfrm>
+            <a:off x="592347" y="1844675"/>
+            <a:ext cx="11007306" cy="1364351"/>
+          </a:xfrm>
+        </p:spPr>
         <p:txBody>
           <a:bodyPr/>
           <a:lstStyle/>
           <a:p>
-            <a:endParaRPr lang="pt-BR"/>
-          </a:p>
-        </p:txBody>
-      </p:sp>
+            <a:pPr algn="just"/>
+            <a:r>
+              <a:rPr lang="pt-BR" sz="1600" dirty="0" err="1"/>
+              <a:t>Hibernate</a:t>
+            </a:r>
+            <a:r>
+              <a:rPr lang="pt-BR" sz="1600" dirty="0"/>
+              <a:t> é um framework Java que implementa a JPA e funciona como um ORM, fazendo a ponte entre objetos Java e bancos de dados relacionais. Ele mapeia classes para tabelas automaticamente, eliminando a necessidade de escrever SQL manualmente. O resultado é um desenvolvimento mais produtivo, com menos código repetitivo e maior foco na lógica de negócio.</a:t>
+            </a:r>
+          </a:p>
+        </p:txBody>
+      </p:sp>
+      <p:pic>
+        <p:nvPicPr>
+          <p:cNvPr id="8" name="Imagem 7">
+            <a:extLst>
+              <a:ext uri="{FF2B5EF4-FFF2-40B4-BE49-F238E27FC236}">
+                <a16:creationId xmlns:a16="http://schemas.microsoft.com/office/drawing/2014/main" id="{6C410BB9-DDA3-52CE-E429-95EDE9AB8CF1}"/>
+              </a:ext>
+            </a:extLst>
+          </p:cNvPr>
+          <p:cNvPicPr>
+            <a:picLocks noChangeAspect="1"/>
+          </p:cNvPicPr>
+          <p:nvPr/>
+        </p:nvPicPr>
+        <p:blipFill>
+          <a:blip r:embed="rId2"/>
+          <a:stretch>
+            <a:fillRect/>
+          </a:stretch>
+        </p:blipFill>
+        <p:spPr>
+          <a:xfrm>
+            <a:off x="2035252" y="3648975"/>
+            <a:ext cx="8121496" cy="2354605"/>
+          </a:xfrm>
+          <a:prstGeom prst="rect">
+            <a:avLst/>
+          </a:prstGeom>
+        </p:spPr>
+      </p:pic>
     </p:spTree>
     <p:extLst>
       <p:ext uri="{BB962C8B-B14F-4D97-AF65-F5344CB8AC3E}">
         <p14:creationId xmlns:p14="http://schemas.microsoft.com/office/powerpoint/2010/main" val="1899750248"/>
+      </p:ext>
+    </p:extLst>
+  </p:cSld>
+  <p:clrMapOvr>
+    <a:masterClrMapping/>
+  </p:clrMapOvr>
+</p:sld>
+</file>
+
+<file path=ppt/slides/slide8.xml><?xml version="1.0" encoding="utf-8"?>
+<p:sld xmlns:a="http://schemas.openxmlformats.org/drawingml/2006/main" xmlns:r="http://schemas.openxmlformats.org/officeDocument/2006/relationships" xmlns:p="http://schemas.openxmlformats.org/presentationml/2006/main">
+  <p:cSld>
+    <p:spTree>
+      <p:nvGrpSpPr>
+        <p:cNvPr id="1" name=""/>
+        <p:cNvGrpSpPr/>
+        <p:nvPr/>
+      </p:nvGrpSpPr>
+      <p:grpSpPr>
+        <a:xfrm>
+          <a:off x="0" y="0"/>
+          <a:ext cx="0" cy="0"/>
+          <a:chOff x="0" y="0"/>
+          <a:chExt cx="0" cy="0"/>
+        </a:xfrm>
+      </p:grpSpPr>
+      <p:sp>
+        <p:nvSpPr>
+          <p:cNvPr id="2" name="Título 1">
+            <a:extLst>
+              <a:ext uri="{FF2B5EF4-FFF2-40B4-BE49-F238E27FC236}">
+                <a16:creationId xmlns:a16="http://schemas.microsoft.com/office/drawing/2014/main" id="{1CD83856-0905-DFEC-AFB1-6A0FCD02336E}"/>
+              </a:ext>
+            </a:extLst>
+          </p:cNvPr>
+          <p:cNvSpPr>
+            <a:spLocks noGrp="1"/>
+          </p:cNvSpPr>
+          <p:nvPr>
+            <p:ph type="title"/>
+          </p:nvPr>
+        </p:nvSpPr>
+        <p:spPr/>
+        <p:txBody>
+          <a:bodyPr/>
+          <a:lstStyle/>
+          <a:p>
+            <a:r>
+              <a:rPr lang="pt-BR" b="1" dirty="0"/>
+              <a:t>Spring Data JPA</a:t>
+            </a:r>
+            <a:endParaRPr lang="pt-BR" dirty="0"/>
+          </a:p>
+        </p:txBody>
+      </p:sp>
+      <p:sp>
+        <p:nvSpPr>
+          <p:cNvPr id="3" name="Espaço Reservado para Conteúdo 2">
+            <a:extLst>
+              <a:ext uri="{FF2B5EF4-FFF2-40B4-BE49-F238E27FC236}">
+                <a16:creationId xmlns:a16="http://schemas.microsoft.com/office/drawing/2014/main" id="{24C28200-4402-6C82-3760-EC6C69125E7A}"/>
+              </a:ext>
+            </a:extLst>
+          </p:cNvPr>
+          <p:cNvSpPr>
+            <a:spLocks noGrp="1"/>
+          </p:cNvSpPr>
+          <p:nvPr>
+            <p:ph idx="1"/>
+          </p:nvPr>
+        </p:nvSpPr>
+        <p:spPr/>
+        <p:txBody>
+          <a:bodyPr/>
+          <a:lstStyle/>
+          <a:p>
+            <a:pPr algn="just"/>
+            <a:r>
+              <a:rPr lang="pt-BR" sz="1600" b="1" dirty="0"/>
+              <a:t>Spring Data JPA</a:t>
+            </a:r>
+            <a:r>
+              <a:rPr lang="pt-BR" sz="1600" dirty="0"/>
+              <a:t> é um dependência do ecossistema Spring que adiciona uma camada de abstração sobre o JPA, simplificando ainda mais o acesso a dados. Com ele, basta criar interfaces de repositório e o Spring gera automaticamente as implementações, eliminando código repetitivo. Os desenvolvedores podem definir consultas apenas pelo nome dos métodos, sem escrever SQL. Ele ainda se integra nativamente com outros recursos do Spring, como injeção de dependência, transações e segurança.</a:t>
+            </a:r>
+          </a:p>
+          <a:p>
+            <a:pPr marL="971550" lvl="1" indent="-285750" algn="just"/>
+            <a:r>
+              <a:rPr lang="pt-BR" sz="1400" dirty="0" err="1"/>
+              <a:t>save</a:t>
+            </a:r>
+            <a:r>
+              <a:rPr lang="pt-BR" sz="1400" dirty="0"/>
+              <a:t>(</a:t>
+            </a:r>
+            <a:r>
+              <a:rPr lang="pt-BR" sz="1400" dirty="0" err="1"/>
+              <a:t>entity</a:t>
+            </a:r>
+            <a:r>
+              <a:rPr lang="pt-BR" sz="1400" dirty="0"/>
+              <a:t>) — salva ou atualiza uma entidade no banco. Se o objeto já possui ID, ele atualiza; se não possui, insere um novo registro.</a:t>
+            </a:r>
+          </a:p>
+          <a:p>
+            <a:pPr marL="971550" lvl="1" indent="-285750" algn="just"/>
+            <a:r>
+              <a:rPr lang="pt-BR" sz="1400" dirty="0" err="1"/>
+              <a:t>findAll</a:t>
+            </a:r>
+            <a:r>
+              <a:rPr lang="pt-BR" sz="1400" dirty="0"/>
+              <a:t>() — retorna uma lista com todos os registros da tabela correspondente à entidade.</a:t>
+            </a:r>
+          </a:p>
+          <a:p>
+            <a:pPr marL="971550" lvl="1" indent="-285750" algn="just"/>
+            <a:r>
+              <a:rPr lang="pt-BR" sz="1400" dirty="0"/>
+              <a:t>delete(</a:t>
+            </a:r>
+            <a:r>
+              <a:rPr lang="pt-BR" sz="1400" dirty="0" err="1"/>
+              <a:t>entity</a:t>
+            </a:r>
+            <a:r>
+              <a:rPr lang="pt-BR" sz="1400" dirty="0"/>
+              <a:t>) — remove do banco o objeto informado como parâmetro.</a:t>
+            </a:r>
+          </a:p>
+        </p:txBody>
+      </p:sp>
+    </p:spTree>
+    <p:extLst>
+      <p:ext uri="{BB962C8B-B14F-4D97-AF65-F5344CB8AC3E}">
+        <p14:creationId xmlns:p14="http://schemas.microsoft.com/office/powerpoint/2010/main" val="756386441"/>
+      </p:ext>
+    </p:extLst>
+  </p:cSld>
+  <p:clrMapOvr>
+    <a:masterClrMapping/>
+  </p:clrMapOvr>
+</p:sld>
+</file>
+
+<file path=ppt/slides/slide9.xml><?xml version="1.0" encoding="utf-8"?>
+<p:sld xmlns:a="http://schemas.openxmlformats.org/drawingml/2006/main" xmlns:r="http://schemas.openxmlformats.org/officeDocument/2006/relationships" xmlns:p="http://schemas.openxmlformats.org/presentationml/2006/main">
+  <p:cSld>
+    <p:spTree>
+      <p:nvGrpSpPr>
+        <p:cNvPr id="1" name=""/>
+        <p:cNvGrpSpPr/>
+        <p:nvPr/>
+      </p:nvGrpSpPr>
+      <p:grpSpPr>
+        <a:xfrm>
+          <a:off x="0" y="0"/>
+          <a:ext cx="0" cy="0"/>
+          <a:chOff x="0" y="0"/>
+          <a:chExt cx="0" cy="0"/>
+        </a:xfrm>
+      </p:grpSpPr>
+      <p:sp>
+        <p:nvSpPr>
+          <p:cNvPr id="2" name="Título 1">
+            <a:extLst>
+              <a:ext uri="{FF2B5EF4-FFF2-40B4-BE49-F238E27FC236}">
+                <a16:creationId xmlns:a16="http://schemas.microsoft.com/office/drawing/2014/main" id="{524B76ED-41D0-A370-2171-483F05B68CAE}"/>
+              </a:ext>
+            </a:extLst>
+          </p:cNvPr>
+          <p:cNvSpPr>
+            <a:spLocks noGrp="1"/>
+          </p:cNvSpPr>
+          <p:nvPr>
+            <p:ph type="title"/>
+          </p:nvPr>
+        </p:nvSpPr>
+        <p:spPr/>
+        <p:txBody>
+          <a:bodyPr/>
+          <a:lstStyle/>
+          <a:p>
+            <a:r>
+              <a:rPr lang="pt-BR" dirty="0"/>
+              <a:t>Veja a comparação:</a:t>
+            </a:r>
+          </a:p>
+        </p:txBody>
+      </p:sp>
+      <p:sp>
+        <p:nvSpPr>
+          <p:cNvPr id="3" name="Espaço Reservado para Conteúdo 2">
+            <a:extLst>
+              <a:ext uri="{FF2B5EF4-FFF2-40B4-BE49-F238E27FC236}">
+                <a16:creationId xmlns:a16="http://schemas.microsoft.com/office/drawing/2014/main" id="{9601DF90-B026-1BE3-CF82-AD53795FF6AE}"/>
+              </a:ext>
+            </a:extLst>
+          </p:cNvPr>
+          <p:cNvSpPr>
+            <a:spLocks noGrp="1"/>
+          </p:cNvSpPr>
+          <p:nvPr>
+            <p:ph idx="1"/>
+          </p:nvPr>
+        </p:nvSpPr>
+        <p:spPr>
+          <a:xfrm>
+            <a:off x="592347" y="1844675"/>
+            <a:ext cx="5204604" cy="4351338"/>
+          </a:xfrm>
+        </p:spPr>
+        <p:txBody>
+          <a:bodyPr/>
+          <a:lstStyle/>
+          <a:p>
+            <a:r>
+              <a:rPr lang="pt-BR" dirty="0"/>
+              <a:t>Modelo Tradicional (SAVE)</a:t>
+            </a:r>
+          </a:p>
+          <a:p>
+            <a:r>
+              <a:rPr lang="pt-BR" sz="1400" dirty="0" err="1"/>
+              <a:t>String</a:t>
+            </a:r>
+            <a:r>
+              <a:rPr lang="pt-BR" sz="1400" dirty="0"/>
+              <a:t> </a:t>
+            </a:r>
+            <a:r>
+              <a:rPr lang="pt-BR" sz="1400" dirty="0" err="1"/>
+              <a:t>sql</a:t>
+            </a:r>
+            <a:r>
+              <a:rPr lang="pt-BR" sz="1400" dirty="0"/>
+              <a:t> = "INSERT INTO produtos (nome, </a:t>
+            </a:r>
+            <a:r>
+              <a:rPr lang="pt-BR" sz="1400" dirty="0" err="1"/>
+              <a:t>preco</a:t>
+            </a:r>
+            <a:r>
+              <a:rPr lang="pt-BR" sz="1400" dirty="0"/>
+              <a:t>) VALUES (?, ?)";</a:t>
+            </a:r>
+          </a:p>
+          <a:p>
+            <a:r>
+              <a:rPr lang="pt-BR" sz="1400" dirty="0" err="1"/>
+              <a:t>PreparedStatement</a:t>
+            </a:r>
+            <a:r>
+              <a:rPr lang="pt-BR" sz="1400" dirty="0"/>
+              <a:t> </a:t>
+            </a:r>
+            <a:r>
+              <a:rPr lang="pt-BR" sz="1400" dirty="0" err="1"/>
+              <a:t>ps</a:t>
+            </a:r>
+            <a:r>
+              <a:rPr lang="pt-BR" sz="1400" dirty="0"/>
+              <a:t> = </a:t>
+            </a:r>
+            <a:r>
+              <a:rPr lang="pt-BR" sz="1400" dirty="0" err="1"/>
+              <a:t>conn.prepareStatement</a:t>
+            </a:r>
+            <a:r>
+              <a:rPr lang="pt-BR" sz="1400" dirty="0"/>
+              <a:t>(</a:t>
+            </a:r>
+            <a:r>
+              <a:rPr lang="pt-BR" sz="1400" dirty="0" err="1"/>
+              <a:t>sql</a:t>
+            </a:r>
+            <a:r>
+              <a:rPr lang="pt-BR" sz="1400" dirty="0"/>
+              <a:t>);</a:t>
+            </a:r>
+          </a:p>
+          <a:p>
+            <a:r>
+              <a:rPr lang="pt-BR" sz="1400" dirty="0" err="1"/>
+              <a:t>ps.setString</a:t>
+            </a:r>
+            <a:r>
+              <a:rPr lang="pt-BR" sz="1400" dirty="0"/>
+              <a:t>(1, </a:t>
+            </a:r>
+            <a:r>
+              <a:rPr lang="pt-BR" sz="1400" dirty="0" err="1"/>
+              <a:t>produto.getNome</a:t>
+            </a:r>
+            <a:r>
+              <a:rPr lang="pt-BR" sz="1400" dirty="0"/>
+              <a:t>());</a:t>
+            </a:r>
+          </a:p>
+          <a:p>
+            <a:r>
+              <a:rPr lang="pt-BR" sz="1400" dirty="0" err="1"/>
+              <a:t>ps.setDouble</a:t>
+            </a:r>
+            <a:r>
+              <a:rPr lang="pt-BR" sz="1400" dirty="0"/>
+              <a:t>(2, </a:t>
+            </a:r>
+            <a:r>
+              <a:rPr lang="pt-BR" sz="1400" dirty="0" err="1"/>
+              <a:t>produto.getPreco</a:t>
+            </a:r>
+            <a:r>
+              <a:rPr lang="pt-BR" sz="1400" dirty="0"/>
+              <a:t>());</a:t>
+            </a:r>
+          </a:p>
+          <a:p>
+            <a:r>
+              <a:rPr lang="pt-BR" sz="1400" dirty="0" err="1"/>
+              <a:t>ps.executeUpdate</a:t>
+            </a:r>
+            <a:r>
+              <a:rPr lang="pt-BR" sz="1400" dirty="0"/>
+              <a:t>();</a:t>
+            </a:r>
+          </a:p>
+          <a:p>
+            <a:endParaRPr lang="pt-BR" dirty="0"/>
+          </a:p>
+        </p:txBody>
+      </p:sp>
+      <p:sp>
+        <p:nvSpPr>
+          <p:cNvPr id="4" name="Espaço Reservado para Conteúdo 2">
+            <a:extLst>
+              <a:ext uri="{FF2B5EF4-FFF2-40B4-BE49-F238E27FC236}">
+                <a16:creationId xmlns:a16="http://schemas.microsoft.com/office/drawing/2014/main" id="{66E367BC-880D-07CC-26A0-E8997D36CBF5}"/>
+              </a:ext>
+            </a:extLst>
+          </p:cNvPr>
+          <p:cNvSpPr txBox="1">
+            <a:spLocks/>
+          </p:cNvSpPr>
+          <p:nvPr/>
+        </p:nvSpPr>
+        <p:spPr>
+          <a:xfrm>
+            <a:off x="6737231" y="1844675"/>
+            <a:ext cx="3959524" cy="4351338"/>
+          </a:xfrm>
+          <a:prstGeom prst="rect">
+            <a:avLst/>
+          </a:prstGeom>
+        </p:spPr>
+        <p:txBody>
+          <a:bodyPr/>
+          <a:lstStyle>
+            <a:lvl1pPr marL="0" indent="0" algn="l" defTabSz="914400" rtl="0" eaLnBrk="1" latinLnBrk="0" hangingPunct="1">
+              <a:lnSpc>
+                <a:spcPct val="150000"/>
+              </a:lnSpc>
+              <a:spcBef>
+                <a:spcPts val="1000"/>
+              </a:spcBef>
+              <a:buFont typeface="Arial" panose="020B0604020202020204" pitchFamily="34" charset="0"/>
+              <a:buNone/>
+              <a:defRPr sz="2000" kern="1200">
+                <a:solidFill>
+                  <a:schemeClr val="tx1"/>
+                </a:solidFill>
+                <a:latin typeface="Times New Roman" panose="02020603050405020304" pitchFamily="18" charset="0"/>
+                <a:ea typeface="+mn-ea"/>
+                <a:cs typeface="Times New Roman" panose="02020603050405020304" pitchFamily="18" charset="0"/>
+              </a:defRPr>
+            </a:lvl1pPr>
+            <a:lvl2pPr marL="685800" indent="-228600" algn="l" defTabSz="914400" rtl="0" eaLnBrk="1" latinLnBrk="0" hangingPunct="1">
+              <a:lnSpc>
+                <a:spcPct val="150000"/>
+              </a:lnSpc>
+              <a:spcBef>
+                <a:spcPts val="500"/>
+              </a:spcBef>
+              <a:buFont typeface="Arial" panose="020B0604020202020204" pitchFamily="34" charset="0"/>
+              <a:buChar char="•"/>
+              <a:defRPr sz="1600" kern="1200">
+                <a:solidFill>
+                  <a:schemeClr val="tx1"/>
+                </a:solidFill>
+                <a:latin typeface="Times New Roman" panose="02020603050405020304" pitchFamily="18" charset="0"/>
+                <a:ea typeface="+mn-ea"/>
+                <a:cs typeface="Times New Roman" panose="02020603050405020304" pitchFamily="18" charset="0"/>
+              </a:defRPr>
+            </a:lvl2pPr>
+            <a:lvl3pPr marL="1143000" indent="-228600" algn="l" defTabSz="914400" rtl="0" eaLnBrk="1" latinLnBrk="0" hangingPunct="1">
+              <a:lnSpc>
+                <a:spcPct val="150000"/>
+              </a:lnSpc>
+              <a:spcBef>
+                <a:spcPts val="500"/>
+              </a:spcBef>
+              <a:buFont typeface="Arial" panose="020B0604020202020204" pitchFamily="34" charset="0"/>
+              <a:buChar char="•"/>
+              <a:defRPr sz="1400" kern="1200">
+                <a:solidFill>
+                  <a:schemeClr val="tx1"/>
+                </a:solidFill>
+                <a:latin typeface="Times New Roman" panose="02020603050405020304" pitchFamily="18" charset="0"/>
+                <a:ea typeface="+mn-ea"/>
+                <a:cs typeface="Times New Roman" panose="02020603050405020304" pitchFamily="18" charset="0"/>
+              </a:defRPr>
+            </a:lvl3pPr>
+            <a:lvl4pPr marL="1600200" indent="-228600" algn="l" defTabSz="914400" rtl="0" eaLnBrk="1" latinLnBrk="0" hangingPunct="1">
+              <a:lnSpc>
+                <a:spcPct val="150000"/>
+              </a:lnSpc>
+              <a:spcBef>
+                <a:spcPts val="500"/>
+              </a:spcBef>
+              <a:buFont typeface="Arial" panose="020B0604020202020204" pitchFamily="34" charset="0"/>
+              <a:buChar char="•"/>
+              <a:defRPr sz="1200" kern="1200">
+                <a:solidFill>
+                  <a:schemeClr val="tx1"/>
+                </a:solidFill>
+                <a:latin typeface="Times New Roman" panose="02020603050405020304" pitchFamily="18" charset="0"/>
+                <a:ea typeface="+mn-ea"/>
+                <a:cs typeface="Times New Roman" panose="02020603050405020304" pitchFamily="18" charset="0"/>
+              </a:defRPr>
+            </a:lvl4pPr>
+            <a:lvl5pPr marL="2057400" indent="-228600" algn="l" defTabSz="914400" rtl="0" eaLnBrk="1" latinLnBrk="0" hangingPunct="1">
+              <a:lnSpc>
+                <a:spcPct val="150000"/>
+              </a:lnSpc>
+              <a:spcBef>
+                <a:spcPts val="500"/>
+              </a:spcBef>
+              <a:buFont typeface="Arial" panose="020B0604020202020204" pitchFamily="34" charset="0"/>
+              <a:buChar char="•"/>
+              <a:defRPr sz="1000" kern="1200">
+                <a:solidFill>
+                  <a:schemeClr val="tx1"/>
+                </a:solidFill>
+                <a:latin typeface="Times New Roman" panose="02020603050405020304" pitchFamily="18" charset="0"/>
+                <a:ea typeface="+mn-ea"/>
+                <a:cs typeface="Times New Roman" panose="02020603050405020304" pitchFamily="18" charset="0"/>
+              </a:defRPr>
+            </a:lvl5pPr>
+            <a:lvl6pPr marL="2514600" indent="-228600" algn="l" defTabSz="914400" rtl="0" eaLnBrk="1" latinLnBrk="0" hangingPunct="1">
+              <a:lnSpc>
+                <a:spcPct val="90000"/>
+              </a:lnSpc>
+              <a:spcBef>
+                <a:spcPts val="500"/>
+              </a:spcBef>
+              <a:buFont typeface="Arial" panose="020B0604020202020204" pitchFamily="34" charset="0"/>
+              <a:buChar char="•"/>
+              <a:defRPr sz="1800" kern="1200">
+                <a:solidFill>
+                  <a:schemeClr val="tx1"/>
+                </a:solidFill>
+                <a:latin typeface="+mn-lt"/>
+                <a:ea typeface="+mn-ea"/>
+                <a:cs typeface="+mn-cs"/>
+              </a:defRPr>
+            </a:lvl6pPr>
+            <a:lvl7pPr marL="2971800" indent="-228600" algn="l" defTabSz="914400" rtl="0" eaLnBrk="1" latinLnBrk="0" hangingPunct="1">
+              <a:lnSpc>
+                <a:spcPct val="90000"/>
+              </a:lnSpc>
+              <a:spcBef>
+                <a:spcPts val="500"/>
+              </a:spcBef>
+              <a:buFont typeface="Arial" panose="020B0604020202020204" pitchFamily="34" charset="0"/>
+              <a:buChar char="•"/>
+              <a:defRPr sz="1800" kern="1200">
+                <a:solidFill>
+                  <a:schemeClr val="tx1"/>
+                </a:solidFill>
+                <a:latin typeface="+mn-lt"/>
+                <a:ea typeface="+mn-ea"/>
+                <a:cs typeface="+mn-cs"/>
+              </a:defRPr>
+            </a:lvl7pPr>
+            <a:lvl8pPr marL="3429000" indent="-228600" algn="l" defTabSz="914400" rtl="0" eaLnBrk="1" latinLnBrk="0" hangingPunct="1">
+              <a:lnSpc>
+                <a:spcPct val="90000"/>
+              </a:lnSpc>
+              <a:spcBef>
+                <a:spcPts val="500"/>
+              </a:spcBef>
+              <a:buFont typeface="Arial" panose="020B0604020202020204" pitchFamily="34" charset="0"/>
+              <a:buChar char="•"/>
+              <a:defRPr sz="1800" kern="1200">
+                <a:solidFill>
+                  <a:schemeClr val="tx1"/>
+                </a:solidFill>
+                <a:latin typeface="+mn-lt"/>
+                <a:ea typeface="+mn-ea"/>
+                <a:cs typeface="+mn-cs"/>
+              </a:defRPr>
+            </a:lvl8pPr>
+            <a:lvl9pPr marL="3886200" indent="-228600" algn="l" defTabSz="914400" rtl="0" eaLnBrk="1" latinLnBrk="0" hangingPunct="1">
+              <a:lnSpc>
+                <a:spcPct val="90000"/>
+              </a:lnSpc>
+              <a:spcBef>
+                <a:spcPts val="500"/>
+              </a:spcBef>
+              <a:buFont typeface="Arial" panose="020B0604020202020204" pitchFamily="34" charset="0"/>
+              <a:buChar char="•"/>
+              <a:defRPr sz="1800" kern="1200">
+                <a:solidFill>
+                  <a:schemeClr val="tx1"/>
+                </a:solidFill>
+                <a:latin typeface="+mn-lt"/>
+                <a:ea typeface="+mn-ea"/>
+                <a:cs typeface="+mn-cs"/>
+              </a:defRPr>
+            </a:lvl9pPr>
+          </a:lstStyle>
+          <a:p>
+            <a:r>
+              <a:rPr lang="pt-BR" dirty="0"/>
+              <a:t>Spring Data JPA (SAVE)</a:t>
+            </a:r>
+            <a:br>
+              <a:rPr lang="pt-BR" dirty="0"/>
+            </a:br>
+            <a:r>
+              <a:rPr lang="pt-BR" dirty="0" err="1"/>
+              <a:t>repository.save</a:t>
+            </a:r>
+            <a:r>
+              <a:rPr lang="pt-BR" dirty="0"/>
+              <a:t>(produto);</a:t>
+            </a:r>
+          </a:p>
+          <a:p>
+            <a:br>
+              <a:rPr lang="pt-BR" dirty="0"/>
+            </a:br>
+            <a:endParaRPr lang="pt-BR" dirty="0"/>
+          </a:p>
+        </p:txBody>
+      </p:sp>
+    </p:spTree>
+    <p:extLst>
+      <p:ext uri="{BB962C8B-B14F-4D97-AF65-F5344CB8AC3E}">
+        <p14:creationId xmlns:p14="http://schemas.microsoft.com/office/powerpoint/2010/main" val="1437897159"/>
       </p:ext>
     </p:extLst>
   </p:cSld>
@@ -6833,18 +7537,18 @@
 </file>
 
 <file path=customXml/item1.xml><?xml version="1.0" encoding="utf-8"?>
-<p:properties xmlns:p="http://schemas.microsoft.com/office/2006/metadata/properties" xmlns:xsi="http://www.w3.org/2001/XMLSchema-instance" xmlns:pc="http://schemas.microsoft.com/office/infopath/2007/PartnerControls">
-  <documentManagement/>
-</p:properties>
-</file>
-
-<file path=customXml/item2.xml><?xml version="1.0" encoding="utf-8"?>
 <?mso-contentType ?>
 <FormTemplates xmlns="http://schemas.microsoft.com/sharepoint/v3/contenttype/forms">
   <Display>DocumentLibraryForm</Display>
   <Edit>DocumentLibraryForm</Edit>
   <New>DocumentLibraryForm</New>
 </FormTemplates>
+</file>
+
+<file path=customXml/item2.xml><?xml version="1.0" encoding="utf-8"?>
+<p:properties xmlns:p="http://schemas.microsoft.com/office/2006/metadata/properties" xmlns:xsi="http://www.w3.org/2001/XMLSchema-instance" xmlns:pc="http://schemas.microsoft.com/office/infopath/2007/PartnerControls">
+  <documentManagement/>
+</p:properties>
 </file>
 
 <file path=customXml/item3.xml><?xml version="1.0" encoding="utf-8"?>
@@ -7010,18 +7714,18 @@
 </file>
 
 <file path=customXml/itemProps1.xml><?xml version="1.0" encoding="utf-8"?>
-<ds:datastoreItem xmlns:ds="http://schemas.openxmlformats.org/officeDocument/2006/customXml" ds:itemID="{44AA641E-A36E-40C4-ABAC-AE8B4CD4DD79}">
+<ds:datastoreItem xmlns:ds="http://schemas.openxmlformats.org/officeDocument/2006/customXml" ds:itemID="{7BA82208-FFF8-4F32-9CA5-4822B26C310B}">
   <ds:schemaRefs>
-    <ds:schemaRef ds:uri="http://schemas.microsoft.com/office/2006/metadata/properties"/>
-    <ds:schemaRef ds:uri="http://schemas.microsoft.com/office/infopath/2007/PartnerControls"/>
+    <ds:schemaRef ds:uri="http://schemas.microsoft.com/sharepoint/v3/contenttype/forms"/>
   </ds:schemaRefs>
 </ds:datastoreItem>
 </file>
 
 <file path=customXml/itemProps2.xml><?xml version="1.0" encoding="utf-8"?>
-<ds:datastoreItem xmlns:ds="http://schemas.openxmlformats.org/officeDocument/2006/customXml" ds:itemID="{7BA82208-FFF8-4F32-9CA5-4822B26C310B}">
+<ds:datastoreItem xmlns:ds="http://schemas.openxmlformats.org/officeDocument/2006/customXml" ds:itemID="{44AA641E-A36E-40C4-ABAC-AE8B4CD4DD79}">
   <ds:schemaRefs>
-    <ds:schemaRef ds:uri="http://schemas.microsoft.com/sharepoint/v3/contenttype/forms"/>
+    <ds:schemaRef ds:uri="http://schemas.microsoft.com/office/2006/metadata/properties"/>
+    <ds:schemaRef ds:uri="http://schemas.microsoft.com/office/infopath/2007/PartnerControls"/>
   </ds:schemaRefs>
 </ds:datastoreItem>
 </file>
